--- a/assets/pptx/catalog-659.pptx
+++ b/assets/pptx/catalog-659.pptx
@@ -3303,7 +3303,7 @@
                 <a:ea typeface="Ebrima"/>
                 <a:cs typeface="Ebrima"/>
               </a:rPr>
-              <a:t>ከቅዱስ ማደሪያው ተነሳ ያ ክንዱ (2x)</a:t>
+              <a:t>ከቅዱስ ማደሪያው ተነሳ ያ ክንዱ 2x</a:t>
             </a:r>
           </a:p>
         </p:txBody>
@@ -3424,7 +3424,7 @@
                 <a:ea typeface="Ebrima"/>
                 <a:cs typeface="Ebrima"/>
               </a:rPr>
-              <a:t>ከቅዱስ ማደሪያው ተነሳ ያ ክንዱ (2x)</a:t>
+              <a:t>ከቅዱስ ማደሪያው ተነሳ ያ ክንዱ 2x</a:t>
             </a:r>
           </a:p>
         </p:txBody>
@@ -3509,7 +3509,7 @@
                 <a:ea typeface="Ebrima"/>
                 <a:cs typeface="Ebrima"/>
               </a:rPr>
-              <a:t>ኃይል ሆነልኝ ለእኔ እግዚአብሔር አገዘኝ (2x)</a:t>
+              <a:t>ኃይል ሆነልኝ ለእኔ እግዚአብሔር አገዘኝ 2x</a:t>
             </a:r>
           </a:p>
           <a:p>
@@ -3545,7 +3545,7 @@
                 <a:ea typeface="Ebrima"/>
                 <a:cs typeface="Ebrima"/>
               </a:rPr>
-              <a:t>እንደ መልካም እርሻ ውብ መዓዛ ሰጠኝ (2x)</a:t>
+              <a:t>እንደ መልካም እርሻ ውብ መዓዛ ሰጠኝ 2x</a:t>
             </a:r>
           </a:p>
         </p:txBody>
@@ -3666,7 +3666,7 @@
                 <a:ea typeface="Ebrima"/>
                 <a:cs typeface="Ebrima"/>
               </a:rPr>
-              <a:t>ከቅዱስ ማደሪያው ተነሳ ያ ክንዱ (2x)</a:t>
+              <a:t>ከቅዱስ ማደሪያው ተነሳ ያ ክንዱ 2x</a:t>
             </a:r>
           </a:p>
         </p:txBody>
@@ -3926,7 +3926,7 @@
                 <a:ea typeface="Ebrima"/>
                 <a:cs typeface="Ebrima"/>
               </a:rPr>
-              <a:t>ከቅዱስ ማደሪያው ተነሳ ያ ክንዱ (2x)</a:t>
+              <a:t>ከቅዱስ ማደሪያው ተነሳ ያ ክንዱ 2x</a:t>
             </a:r>
           </a:p>
         </p:txBody>
@@ -4186,7 +4186,7 @@
                 <a:ea typeface="Ebrima"/>
                 <a:cs typeface="Ebrima"/>
               </a:rPr>
-              <a:t>ከቅዱስ ማደሪያው ተነሳ ያ ክንዱ (2x)</a:t>
+              <a:t>ከቅዱስ ማደሪያው ተነሳ ያ ክንዱ 2x</a:t>
             </a:r>
           </a:p>
         </p:txBody>
